--- a/class/cloud_infra_mgmt/12주차_Jenkins_CICD심화/01_강의자료/2차시_Jenkinsfile작성과수동빌드.pptx
+++ b/class/cloud_infra_mgmt/12주차_Jenkins_CICD심화/01_강의자료/2차시_Jenkinsfile작성과수동빌드.pptx
@@ -9987,7 +9987,7 @@
               </a:lnSpc>
             </a:pPr>
             <a:r>
-              <a:rPr sz="1500" b="1">
+              <a:rPr sz="1700" b="1">
                 <a:solidFill>
                   <a:srgbClr val="0D9488"/>
                 </a:solidFill>
@@ -9996,7 +9996,7 @@
               <a:t>●  </a:t>
             </a:r>
             <a:r>
-              <a:rPr sz="1500" b="0">
+              <a:rPr sz="1700" b="0">
                 <a:solidFill>
                   <a:srgbClr val="222733"/>
                 </a:solidFill>
@@ -10012,7 +10012,7 @@
               </a:lnSpc>
             </a:pPr>
             <a:r>
-              <a:rPr sz="1500" b="1">
+              <a:rPr sz="1700" b="1">
                 <a:solidFill>
                   <a:srgbClr val="0D9488"/>
                 </a:solidFill>
@@ -10021,7 +10021,7 @@
               <a:t>●  </a:t>
             </a:r>
             <a:r>
-              <a:rPr sz="1500" b="0">
+              <a:rPr sz="1700" b="0">
                 <a:solidFill>
                   <a:srgbClr val="222733"/>
                 </a:solidFill>
@@ -10037,7 +10037,7 @@
               </a:lnSpc>
             </a:pPr>
             <a:r>
-              <a:rPr sz="1500" b="1">
+              <a:rPr sz="1700" b="1">
                 <a:solidFill>
                   <a:srgbClr val="0D9488"/>
                 </a:solidFill>
@@ -10046,7 +10046,7 @@
               <a:t>●  </a:t>
             </a:r>
             <a:r>
-              <a:rPr sz="1500" b="0">
+              <a:rPr sz="1700" b="0">
                 <a:solidFill>
                   <a:srgbClr val="222733"/>
                 </a:solidFill>

--- a/class/cloud_infra_mgmt/12주차_Jenkins_CICD심화/01_강의자료/2차시_Jenkinsfile작성과수동빌드.pptx
+++ b/class/cloud_infra_mgmt/12주차_Jenkins_CICD심화/01_강의자료/2차시_Jenkinsfile작성과수동빌드.pptx
@@ -5289,7 +5289,7 @@
           <a:p>
             <a:pPr>
               <a:lnSpc>
-                <a:spcPct val="115000"/>
+                <a:spcPct val="149500"/>
               </a:lnSpc>
             </a:pPr>
             <a:r>
@@ -5314,7 +5314,7 @@
           <a:p>
             <a:pPr>
               <a:lnSpc>
-                <a:spcPct val="115000"/>
+                <a:spcPct val="149500"/>
               </a:lnSpc>
             </a:pPr>
             <a:r>
@@ -5339,7 +5339,7 @@
           <a:p>
             <a:pPr>
               <a:lnSpc>
-                <a:spcPct val="115000"/>
+                <a:spcPct val="149500"/>
               </a:lnSpc>
             </a:pPr>
             <a:r>
@@ -5730,7 +5730,7 @@
           <a:p>
             <a:pPr>
               <a:lnSpc>
-                <a:spcPct val="115000"/>
+                <a:spcPct val="149500"/>
               </a:lnSpc>
             </a:pPr>
             <a:r>
@@ -5755,7 +5755,7 @@
           <a:p>
             <a:pPr>
               <a:lnSpc>
-                <a:spcPct val="115000"/>
+                <a:spcPct val="149500"/>
               </a:lnSpc>
             </a:pPr>
             <a:r>
@@ -5780,7 +5780,7 @@
           <a:p>
             <a:pPr>
               <a:lnSpc>
-                <a:spcPct val="115000"/>
+                <a:spcPct val="149500"/>
               </a:lnSpc>
             </a:pPr>
             <a:r>
@@ -5805,7 +5805,7 @@
           <a:p>
             <a:pPr>
               <a:lnSpc>
-                <a:spcPct val="115000"/>
+                <a:spcPct val="149500"/>
               </a:lnSpc>
             </a:pPr>
             <a:r>
@@ -7054,16 +7054,104 @@
       </p:sp>
       <p:sp>
         <p:nvSpPr>
-          <p:cNvPr id="7" name="Isosceles Triangle 6"/>
+          <p:cNvPr id="7" name="Rectangle 6"/>
           <p:cNvSpPr/>
           <p:nvPr/>
         </p:nvSpPr>
         <p:spPr>
-          <a:xfrm rot="5400000">
-            <a:off x="3495751" y="1673352"/>
-            <a:ext cx="146304" cy="146304"/>
-          </a:xfrm>
-          <a:prstGeom prst="triangle">
+          <a:xfrm>
+            <a:off x="5096865" y="1730959"/>
+            <a:ext cx="1995220" cy="31089"/>
+          </a:xfrm>
+          <a:prstGeom prst="rect">
+            <a:avLst/>
+          </a:prstGeom>
+          <a:solidFill>
+            <a:srgbClr val="14B8A6"/>
+          </a:solidFill>
+          <a:ln>
+            <a:noFill/>
+          </a:ln>
+          <a:effectLst/>
+        </p:spPr>
+        <p:style>
+          <a:lnRef idx="1">
+            <a:schemeClr val="accent1"/>
+          </a:lnRef>
+          <a:fillRef idx="3">
+            <a:schemeClr val="accent1"/>
+          </a:fillRef>
+          <a:effectRef idx="2">
+            <a:schemeClr val="accent1"/>
+          </a:effectRef>
+          <a:fontRef idx="minor">
+            <a:schemeClr val="lt1"/>
+          </a:fontRef>
+        </p:style>
+        <p:txBody>
+          <a:bodyPr rtlCol="0" anchor="ctr"/>
+          <a:lstStyle/>
+          <a:p>
+            <a:pPr algn="ctr"/>
+          </a:p>
+        </p:txBody>
+      </p:sp>
+      <p:sp>
+        <p:nvSpPr>
+          <p:cNvPr id="8" name="Rectangle 7"/>
+          <p:cNvSpPr/>
+          <p:nvPr/>
+        </p:nvSpPr>
+        <p:spPr>
+          <a:xfrm>
+            <a:off x="7622438" y="1730959"/>
+            <a:ext cx="1995220" cy="31089"/>
+          </a:xfrm>
+          <a:prstGeom prst="rect">
+            <a:avLst/>
+          </a:prstGeom>
+          <a:solidFill>
+            <a:srgbClr val="14B8A6"/>
+          </a:solidFill>
+          <a:ln>
+            <a:noFill/>
+          </a:ln>
+          <a:effectLst/>
+        </p:spPr>
+        <p:style>
+          <a:lnRef idx="1">
+            <a:schemeClr val="accent1"/>
+          </a:lnRef>
+          <a:fillRef idx="3">
+            <a:schemeClr val="accent1"/>
+          </a:fillRef>
+          <a:effectRef idx="2">
+            <a:schemeClr val="accent1"/>
+          </a:effectRef>
+          <a:fontRef idx="minor">
+            <a:schemeClr val="lt1"/>
+          </a:fontRef>
+        </p:style>
+        <p:txBody>
+          <a:bodyPr rtlCol="0" anchor="ctr"/>
+          <a:lstStyle/>
+          <a:p>
+            <a:pPr algn="ctr"/>
+          </a:p>
+        </p:txBody>
+      </p:sp>
+      <p:sp>
+        <p:nvSpPr>
+          <p:cNvPr id="9" name="Oval 8"/>
+          <p:cNvSpPr/>
+          <p:nvPr/>
+        </p:nvSpPr>
+        <p:spPr>
+          <a:xfrm>
+            <a:off x="2040940" y="1481328"/>
+            <a:ext cx="530352" cy="530352"/>
+          </a:xfrm>
+          <a:prstGeom prst="ellipse">
             <a:avLst/>
           </a:prstGeom>
           <a:solidFill>
@@ -7098,227 +7186,7 @@
       </p:sp>
       <p:sp>
         <p:nvSpPr>
-          <p:cNvPr id="8" name="Rectangle 7"/>
-          <p:cNvSpPr/>
-          <p:nvPr/>
-        </p:nvSpPr>
-        <p:spPr>
-          <a:xfrm>
-            <a:off x="5096865" y="1730959"/>
-            <a:ext cx="1995220" cy="31089"/>
-          </a:xfrm>
-          <a:prstGeom prst="rect">
-            <a:avLst/>
-          </a:prstGeom>
-          <a:solidFill>
-            <a:srgbClr val="14B8A6"/>
-          </a:solidFill>
-          <a:ln>
-            <a:noFill/>
-          </a:ln>
-          <a:effectLst/>
-        </p:spPr>
-        <p:style>
-          <a:lnRef idx="1">
-            <a:schemeClr val="accent1"/>
-          </a:lnRef>
-          <a:fillRef idx="3">
-            <a:schemeClr val="accent1"/>
-          </a:fillRef>
-          <a:effectRef idx="2">
-            <a:schemeClr val="accent1"/>
-          </a:effectRef>
-          <a:fontRef idx="minor">
-            <a:schemeClr val="lt1"/>
-          </a:fontRef>
-        </p:style>
-        <p:txBody>
-          <a:bodyPr rtlCol="0" anchor="ctr"/>
-          <a:lstStyle/>
-          <a:p>
-            <a:pPr algn="ctr"/>
-          </a:p>
-        </p:txBody>
-      </p:sp>
-      <p:sp>
-        <p:nvSpPr>
-          <p:cNvPr id="9" name="Isosceles Triangle 8"/>
-          <p:cNvSpPr/>
-          <p:nvPr/>
-        </p:nvSpPr>
-        <p:spPr>
-          <a:xfrm rot="5400000">
-            <a:off x="6021324" y="1673352"/>
-            <a:ext cx="146304" cy="146304"/>
-          </a:xfrm>
-          <a:prstGeom prst="triangle">
-            <a:avLst/>
-          </a:prstGeom>
-          <a:solidFill>
-            <a:srgbClr val="0D9488"/>
-          </a:solidFill>
-          <a:ln>
-            <a:noFill/>
-          </a:ln>
-          <a:effectLst/>
-        </p:spPr>
-        <p:style>
-          <a:lnRef idx="1">
-            <a:schemeClr val="accent1"/>
-          </a:lnRef>
-          <a:fillRef idx="3">
-            <a:schemeClr val="accent1"/>
-          </a:fillRef>
-          <a:effectRef idx="2">
-            <a:schemeClr val="accent1"/>
-          </a:effectRef>
-          <a:fontRef idx="minor">
-            <a:schemeClr val="lt1"/>
-          </a:fontRef>
-        </p:style>
-        <p:txBody>
-          <a:bodyPr rtlCol="0" anchor="ctr"/>
-          <a:lstStyle/>
-          <a:p>
-            <a:pPr algn="ctr"/>
-          </a:p>
-        </p:txBody>
-      </p:sp>
-      <p:sp>
-        <p:nvSpPr>
-          <p:cNvPr id="10" name="Rectangle 9"/>
-          <p:cNvSpPr/>
-          <p:nvPr/>
-        </p:nvSpPr>
-        <p:spPr>
-          <a:xfrm>
-            <a:off x="7622438" y="1730959"/>
-            <a:ext cx="1995220" cy="31089"/>
-          </a:xfrm>
-          <a:prstGeom prst="rect">
-            <a:avLst/>
-          </a:prstGeom>
-          <a:solidFill>
-            <a:srgbClr val="14B8A6"/>
-          </a:solidFill>
-          <a:ln>
-            <a:noFill/>
-          </a:ln>
-          <a:effectLst/>
-        </p:spPr>
-        <p:style>
-          <a:lnRef idx="1">
-            <a:schemeClr val="accent1"/>
-          </a:lnRef>
-          <a:fillRef idx="3">
-            <a:schemeClr val="accent1"/>
-          </a:fillRef>
-          <a:effectRef idx="2">
-            <a:schemeClr val="accent1"/>
-          </a:effectRef>
-          <a:fontRef idx="minor">
-            <a:schemeClr val="lt1"/>
-          </a:fontRef>
-        </p:style>
-        <p:txBody>
-          <a:bodyPr rtlCol="0" anchor="ctr"/>
-          <a:lstStyle/>
-          <a:p>
-            <a:pPr algn="ctr"/>
-          </a:p>
-        </p:txBody>
-      </p:sp>
-      <p:sp>
-        <p:nvSpPr>
-          <p:cNvPr id="11" name="Isosceles Triangle 10"/>
-          <p:cNvSpPr/>
-          <p:nvPr/>
-        </p:nvSpPr>
-        <p:spPr>
-          <a:xfrm rot="5400000">
-            <a:off x="8546896" y="1673352"/>
-            <a:ext cx="146304" cy="146304"/>
-          </a:xfrm>
-          <a:prstGeom prst="triangle">
-            <a:avLst/>
-          </a:prstGeom>
-          <a:solidFill>
-            <a:srgbClr val="0D9488"/>
-          </a:solidFill>
-          <a:ln>
-            <a:noFill/>
-          </a:ln>
-          <a:effectLst/>
-        </p:spPr>
-        <p:style>
-          <a:lnRef idx="1">
-            <a:schemeClr val="accent1"/>
-          </a:lnRef>
-          <a:fillRef idx="3">
-            <a:schemeClr val="accent1"/>
-          </a:fillRef>
-          <a:effectRef idx="2">
-            <a:schemeClr val="accent1"/>
-          </a:effectRef>
-          <a:fontRef idx="minor">
-            <a:schemeClr val="lt1"/>
-          </a:fontRef>
-        </p:style>
-        <p:txBody>
-          <a:bodyPr rtlCol="0" anchor="ctr"/>
-          <a:lstStyle/>
-          <a:p>
-            <a:pPr algn="ctr"/>
-          </a:p>
-        </p:txBody>
-      </p:sp>
-      <p:sp>
-        <p:nvSpPr>
-          <p:cNvPr id="12" name="Oval 11"/>
-          <p:cNvSpPr/>
-          <p:nvPr/>
-        </p:nvSpPr>
-        <p:spPr>
-          <a:xfrm>
-            <a:off x="2040940" y="1481328"/>
-            <a:ext cx="530352" cy="530352"/>
-          </a:xfrm>
-          <a:prstGeom prst="ellipse">
-            <a:avLst/>
-          </a:prstGeom>
-          <a:solidFill>
-            <a:srgbClr val="0D9488"/>
-          </a:solidFill>
-          <a:ln>
-            <a:noFill/>
-          </a:ln>
-          <a:effectLst/>
-        </p:spPr>
-        <p:style>
-          <a:lnRef idx="1">
-            <a:schemeClr val="accent1"/>
-          </a:lnRef>
-          <a:fillRef idx="3">
-            <a:schemeClr val="accent1"/>
-          </a:fillRef>
-          <a:effectRef idx="2">
-            <a:schemeClr val="accent1"/>
-          </a:effectRef>
-          <a:fontRef idx="minor">
-            <a:schemeClr val="lt1"/>
-          </a:fontRef>
-        </p:style>
-        <p:txBody>
-          <a:bodyPr rtlCol="0" anchor="ctr"/>
-          <a:lstStyle/>
-          <a:p>
-            <a:pPr algn="ctr"/>
-          </a:p>
-        </p:txBody>
-      </p:sp>
-      <p:sp>
-        <p:nvSpPr>
-          <p:cNvPr id="13" name="TextBox 12"/>
+          <p:cNvPr id="10" name="TextBox 9"/>
           <p:cNvSpPr txBox="1"/>
           <p:nvPr/>
         </p:nvSpPr>
@@ -7353,7 +7221,7 @@
       </p:sp>
       <p:sp>
         <p:nvSpPr>
-          <p:cNvPr id="14" name="Rounded Rectangle 13"/>
+          <p:cNvPr id="11" name="Rounded Rectangle 10"/>
           <p:cNvSpPr/>
           <p:nvPr/>
         </p:nvSpPr>
@@ -7401,7 +7269,7 @@
       </p:sp>
       <p:sp>
         <p:nvSpPr>
-          <p:cNvPr id="15" name="TextBox 14"/>
+          <p:cNvPr id="12" name="TextBox 11"/>
           <p:cNvSpPr txBox="1"/>
           <p:nvPr/>
         </p:nvSpPr>
@@ -7436,7 +7304,7 @@
       </p:sp>
       <p:sp>
         <p:nvSpPr>
-          <p:cNvPr id="16" name="TextBox 15"/>
+          <p:cNvPr id="13" name="TextBox 12"/>
           <p:cNvSpPr txBox="1"/>
           <p:nvPr/>
         </p:nvSpPr>
@@ -7475,7 +7343,7 @@
       </p:sp>
       <p:sp>
         <p:nvSpPr>
-          <p:cNvPr id="17" name="Oval 16"/>
+          <p:cNvPr id="14" name="Oval 13"/>
           <p:cNvSpPr/>
           <p:nvPr/>
         </p:nvSpPr>
@@ -7519,7 +7387,7 @@
       </p:sp>
       <p:sp>
         <p:nvSpPr>
-          <p:cNvPr id="18" name="TextBox 17"/>
+          <p:cNvPr id="15" name="TextBox 14"/>
           <p:cNvSpPr txBox="1"/>
           <p:nvPr/>
         </p:nvSpPr>
@@ -7554,7 +7422,7 @@
       </p:sp>
       <p:sp>
         <p:nvSpPr>
-          <p:cNvPr id="19" name="Rounded Rectangle 18"/>
+          <p:cNvPr id="16" name="Rounded Rectangle 15"/>
           <p:cNvSpPr/>
           <p:nvPr/>
         </p:nvSpPr>
@@ -7602,7 +7470,7 @@
       </p:sp>
       <p:sp>
         <p:nvSpPr>
-          <p:cNvPr id="20" name="TextBox 19"/>
+          <p:cNvPr id="17" name="TextBox 16"/>
           <p:cNvSpPr txBox="1"/>
           <p:nvPr/>
         </p:nvSpPr>
@@ -7637,7 +7505,7 @@
       </p:sp>
       <p:sp>
         <p:nvSpPr>
-          <p:cNvPr id="21" name="TextBox 20"/>
+          <p:cNvPr id="18" name="TextBox 17"/>
           <p:cNvSpPr txBox="1"/>
           <p:nvPr/>
         </p:nvSpPr>
@@ -7676,7 +7544,7 @@
       </p:sp>
       <p:sp>
         <p:nvSpPr>
-          <p:cNvPr id="22" name="Oval 21"/>
+          <p:cNvPr id="19" name="Oval 18"/>
           <p:cNvSpPr/>
           <p:nvPr/>
         </p:nvSpPr>
@@ -7720,7 +7588,7 @@
       </p:sp>
       <p:sp>
         <p:nvSpPr>
-          <p:cNvPr id="23" name="TextBox 22"/>
+          <p:cNvPr id="20" name="TextBox 19"/>
           <p:cNvSpPr txBox="1"/>
           <p:nvPr/>
         </p:nvSpPr>
@@ -7755,7 +7623,7 @@
       </p:sp>
       <p:sp>
         <p:nvSpPr>
-          <p:cNvPr id="24" name="Rounded Rectangle 23"/>
+          <p:cNvPr id="21" name="Rounded Rectangle 20"/>
           <p:cNvSpPr/>
           <p:nvPr/>
         </p:nvSpPr>
@@ -7803,7 +7671,7 @@
       </p:sp>
       <p:sp>
         <p:nvSpPr>
-          <p:cNvPr id="25" name="TextBox 24"/>
+          <p:cNvPr id="22" name="TextBox 21"/>
           <p:cNvSpPr txBox="1"/>
           <p:nvPr/>
         </p:nvSpPr>
@@ -7838,7 +7706,7 @@
       </p:sp>
       <p:sp>
         <p:nvSpPr>
-          <p:cNvPr id="26" name="TextBox 25"/>
+          <p:cNvPr id="23" name="TextBox 22"/>
           <p:cNvSpPr txBox="1"/>
           <p:nvPr/>
         </p:nvSpPr>
@@ -7877,7 +7745,7 @@
       </p:sp>
       <p:sp>
         <p:nvSpPr>
-          <p:cNvPr id="27" name="Oval 26"/>
+          <p:cNvPr id="24" name="Oval 23"/>
           <p:cNvSpPr/>
           <p:nvPr/>
         </p:nvSpPr>
@@ -7921,7 +7789,7 @@
       </p:sp>
       <p:sp>
         <p:nvSpPr>
-          <p:cNvPr id="28" name="TextBox 27"/>
+          <p:cNvPr id="25" name="TextBox 24"/>
           <p:cNvSpPr txBox="1"/>
           <p:nvPr/>
         </p:nvSpPr>
@@ -7956,7 +7824,7 @@
       </p:sp>
       <p:sp>
         <p:nvSpPr>
-          <p:cNvPr id="29" name="Rounded Rectangle 28"/>
+          <p:cNvPr id="26" name="Rounded Rectangle 25"/>
           <p:cNvSpPr/>
           <p:nvPr/>
         </p:nvSpPr>
@@ -8004,7 +7872,7 @@
       </p:sp>
       <p:sp>
         <p:nvSpPr>
-          <p:cNvPr id="30" name="TextBox 29"/>
+          <p:cNvPr id="27" name="TextBox 26"/>
           <p:cNvSpPr txBox="1"/>
           <p:nvPr/>
         </p:nvSpPr>
@@ -8039,7 +7907,7 @@
       </p:sp>
       <p:sp>
         <p:nvSpPr>
-          <p:cNvPr id="31" name="TextBox 30"/>
+          <p:cNvPr id="28" name="TextBox 27"/>
           <p:cNvSpPr txBox="1"/>
           <p:nvPr/>
         </p:nvSpPr>
@@ -8078,7 +7946,7 @@
       </p:sp>
       <p:sp>
         <p:nvSpPr>
-          <p:cNvPr id="32" name="TextBox 31"/>
+          <p:cNvPr id="29" name="TextBox 28"/>
           <p:cNvSpPr txBox="1"/>
           <p:nvPr/>
         </p:nvSpPr>
@@ -8113,7 +7981,7 @@
       </p:sp>
       <p:sp>
         <p:nvSpPr>
-          <p:cNvPr id="33" name="TextBox 32"/>
+          <p:cNvPr id="30" name="TextBox 29"/>
           <p:cNvSpPr txBox="1"/>
           <p:nvPr/>
         </p:nvSpPr>
@@ -8148,7 +8016,7 @@
       </p:sp>
       <p:sp>
         <p:nvSpPr>
-          <p:cNvPr id="34" name="Rectangle 33"/>
+          <p:cNvPr id="31" name="Rectangle 30"/>
           <p:cNvSpPr/>
           <p:nvPr/>
         </p:nvSpPr>
@@ -8672,7 +8540,7 @@
           <a:p>
             <a:pPr>
               <a:lnSpc>
-                <a:spcPct val="115000"/>
+                <a:spcPct val="149500"/>
               </a:lnSpc>
             </a:pPr>
             <a:r>
@@ -8697,7 +8565,7 @@
           <a:p>
             <a:pPr>
               <a:lnSpc>
-                <a:spcPct val="115000"/>
+                <a:spcPct val="149500"/>
               </a:lnSpc>
             </a:pPr>
             <a:r>
@@ -8722,7 +8590,7 @@
           <a:p>
             <a:pPr>
               <a:lnSpc>
-                <a:spcPct val="115000"/>
+                <a:spcPct val="149500"/>
               </a:lnSpc>
             </a:pPr>
             <a:r>
@@ -9113,7 +8981,7 @@
           <a:p>
             <a:pPr>
               <a:lnSpc>
-                <a:spcPct val="115000"/>
+                <a:spcPct val="149500"/>
               </a:lnSpc>
             </a:pPr>
             <a:r>
@@ -9138,7 +9006,7 @@
           <a:p>
             <a:pPr>
               <a:lnSpc>
-                <a:spcPct val="115000"/>
+                <a:spcPct val="149500"/>
               </a:lnSpc>
             </a:pPr>
             <a:r>
@@ -9163,7 +9031,7 @@
           <a:p>
             <a:pPr>
               <a:lnSpc>
-                <a:spcPct val="115000"/>
+                <a:spcPct val="149500"/>
               </a:lnSpc>
             </a:pPr>
             <a:r>
@@ -9188,7 +9056,7 @@
           <a:p>
             <a:pPr>
               <a:lnSpc>
-                <a:spcPct val="115000"/>
+                <a:spcPct val="149500"/>
               </a:lnSpc>
             </a:pPr>
             <a:r>
@@ -9213,7 +9081,7 @@
           <a:p>
             <a:pPr>
               <a:lnSpc>
-                <a:spcPct val="115000"/>
+                <a:spcPct val="149500"/>
               </a:lnSpc>
             </a:pPr>
             <a:r>
@@ -9238,7 +9106,7 @@
           <a:p>
             <a:pPr>
               <a:lnSpc>
-                <a:spcPct val="115000"/>
+                <a:spcPct val="149500"/>
               </a:lnSpc>
             </a:pPr>
             <a:r>
@@ -9263,7 +9131,7 @@
           <a:p>
             <a:pPr>
               <a:lnSpc>
-                <a:spcPct val="115000"/>
+                <a:spcPct val="149500"/>
               </a:lnSpc>
             </a:pPr>
             <a:r>
@@ -9288,7 +9156,7 @@
           <a:p>
             <a:pPr>
               <a:lnSpc>
-                <a:spcPct val="115000"/>
+                <a:spcPct val="149500"/>
               </a:lnSpc>
             </a:pPr>
             <a:r>
@@ -9313,7 +9181,7 @@
           <a:p>
             <a:pPr>
               <a:lnSpc>
-                <a:spcPct val="115000"/>
+                <a:spcPct val="149500"/>
               </a:lnSpc>
             </a:pPr>
             <a:r>
@@ -9338,7 +9206,7 @@
           <a:p>
             <a:pPr>
               <a:lnSpc>
-                <a:spcPct val="115000"/>
+                <a:spcPct val="149500"/>
               </a:lnSpc>
             </a:pPr>
             <a:r>
@@ -9363,7 +9231,7 @@
           <a:p>
             <a:pPr>
               <a:lnSpc>
-                <a:spcPct val="115000"/>
+                <a:spcPct val="149500"/>
               </a:lnSpc>
             </a:pPr>
             <a:r>
@@ -9983,7 +9851,7 @@
           <a:p>
             <a:pPr>
               <a:lnSpc>
-                <a:spcPct val="115000"/>
+                <a:spcPct val="149500"/>
               </a:lnSpc>
             </a:pPr>
             <a:r>
@@ -10008,7 +9876,7 @@
           <a:p>
             <a:pPr>
               <a:lnSpc>
-                <a:spcPct val="115000"/>
+                <a:spcPct val="149500"/>
               </a:lnSpc>
             </a:pPr>
             <a:r>
@@ -10033,7 +9901,7 @@
           <a:p>
             <a:pPr>
               <a:lnSpc>
-                <a:spcPct val="115000"/>
+                <a:spcPct val="149500"/>
               </a:lnSpc>
             </a:pPr>
             <a:r>
@@ -10696,7 +10564,7 @@
           <a:p>
             <a:pPr>
               <a:lnSpc>
-                <a:spcPct val="115000"/>
+                <a:spcPct val="149500"/>
               </a:lnSpc>
             </a:pPr>
             <a:r>
@@ -10721,7 +10589,7 @@
           <a:p>
             <a:pPr>
               <a:lnSpc>
-                <a:spcPct val="115000"/>
+                <a:spcPct val="149500"/>
               </a:lnSpc>
             </a:pPr>
             <a:r>
@@ -10746,7 +10614,7 @@
           <a:p>
             <a:pPr>
               <a:lnSpc>
-                <a:spcPct val="115000"/>
+                <a:spcPct val="149500"/>
               </a:lnSpc>
             </a:pPr>
             <a:r>

--- a/class/cloud_infra_mgmt/12주차_Jenkins_CICD심화/01_강의자료/2차시_Jenkinsfile작성과수동빌드.pptx
+++ b/class/cloud_infra_mgmt/12주차_Jenkins_CICD심화/01_강의자료/2차시_Jenkinsfile작성과수동빌드.pptx
@@ -4925,6 +4925,8 @@
                   <a:srgbClr val="14B8A6"/>
                 </a:solidFill>
                 <a:latin typeface="맑은 고딕"/>
+                <a:ea typeface="맑은 고딕"/>
+                <a:cs typeface="맑은 고딕"/>
               </a:rPr>
               <a:t>클라우드인프라관리  ·  12주차 2차시</a:t>
             </a:r>
@@ -4960,6 +4962,8 @@
                   <a:srgbClr val="FFFFFF"/>
                 </a:solidFill>
                 <a:latin typeface="맑은 고딕"/>
+                <a:ea typeface="맑은 고딕"/>
+                <a:cs typeface="맑은 고딕"/>
               </a:rPr>
               <a:t>Jenkinsfile 작성과 수동 빌드</a:t>
             </a:r>
@@ -4995,6 +4999,8 @@
                   <a:srgbClr val="C9D3E6"/>
                 </a:solidFill>
                 <a:latin typeface="맑은 고딕"/>
+                <a:ea typeface="맑은 고딕"/>
+                <a:cs typeface="맑은 고딕"/>
               </a:rPr>
               <a:t>Pipeline Job을 만들고 Build Now로 실행하기</a:t>
             </a:r>
@@ -5030,6 +5036,8 @@
                   <a:srgbClr val="FFFFFF"/>
                 </a:solidFill>
                 <a:latin typeface="맑은 고딕"/>
+                <a:ea typeface="맑은 고딕"/>
+                <a:cs typeface="맑은 고딕"/>
               </a:rPr>
               <a:t>영남이공대학교 김지윤교수</a:t>
             </a:r>
@@ -5189,6 +5197,8 @@
                   <a:srgbClr val="14213D"/>
                 </a:solidFill>
                 <a:latin typeface="맑은 고딕"/>
+                <a:ea typeface="맑은 고딕"/>
+                <a:cs typeface="맑은 고딕"/>
               </a:rPr>
               <a:t>03</a:t>
             </a:r>
@@ -5224,6 +5234,8 @@
                   <a:srgbClr val="14B8A6"/>
                 </a:solidFill>
                 <a:latin typeface="맑은 고딕"/>
+                <a:ea typeface="맑은 고딕"/>
+                <a:cs typeface="맑은 고딕"/>
               </a:rPr>
               <a:t>실습 안내</a:t>
             </a:r>
@@ -5259,6 +5271,8 @@
                   <a:srgbClr val="FFFFFF"/>
                 </a:solidFill>
                 <a:latin typeface="맑은 고딕"/>
+                <a:ea typeface="맑은 고딕"/>
+                <a:cs typeface="맑은 고딕"/>
               </a:rPr>
               <a:t>Killercoda — Pipeline Job 생성 실습</a:t>
             </a:r>
@@ -5298,6 +5312,8 @@
                   <a:srgbClr val="0D9488"/>
                 </a:solidFill>
                 <a:latin typeface="맑은 고딕"/>
+                <a:ea typeface="맑은 고딕"/>
+                <a:cs typeface="맑은 고딕"/>
               </a:rPr>
               <a:t>●  </a:t>
             </a:r>
@@ -5307,6 +5323,8 @@
                   <a:srgbClr val="222733"/>
                 </a:solidFill>
                 <a:latin typeface="맑은 고딕"/>
+                <a:ea typeface="맑은 고딕"/>
+                <a:cs typeface="맑은 고딕"/>
               </a:rPr>
               <a:t>교수자가 제공한 공개 저장소를 Checkout하는 Jenkinsfile 작성</a:t>
             </a:r>
@@ -5323,6 +5341,8 @@
                   <a:srgbClr val="0D9488"/>
                 </a:solidFill>
                 <a:latin typeface="맑은 고딕"/>
+                <a:ea typeface="맑은 고딕"/>
+                <a:cs typeface="맑은 고딕"/>
               </a:rPr>
               <a:t>●  </a:t>
             </a:r>
@@ -5332,6 +5352,8 @@
                   <a:srgbClr val="222733"/>
                 </a:solidFill>
                 <a:latin typeface="맑은 고딕"/>
+                <a:ea typeface="맑은 고딕"/>
+                <a:cs typeface="맑은 고딕"/>
               </a:rPr>
               <a:t>Pipeline Job 생성 후 Pipeline script에 붙여넣고 Build Now 실행</a:t>
             </a:r>
@@ -5348,6 +5370,8 @@
                   <a:srgbClr val="0D9488"/>
                 </a:solidFill>
                 <a:latin typeface="맑은 고딕"/>
+                <a:ea typeface="맑은 고딕"/>
+                <a:cs typeface="맑은 고딕"/>
               </a:rPr>
               <a:t>●  </a:t>
             </a:r>
@@ -5357,6 +5381,8 @@
                   <a:srgbClr val="222733"/>
                 </a:solidFill>
                 <a:latin typeface="맑은 고딕"/>
+                <a:ea typeface="맑은 고딕"/>
+                <a:cs typeface="맑은 고딕"/>
               </a:rPr>
               <a:t>Stage View와 Console Output에서 Checkout 단계 성공 확인</a:t>
             </a:r>
@@ -5392,6 +5418,8 @@
                   <a:srgbClr val="5B6373"/>
                 </a:solidFill>
                 <a:latin typeface="맑은 고딕"/>
+                <a:ea typeface="맑은 고딕"/>
+                <a:cs typeface="맑은 고딕"/>
               </a:rPr>
               <a:t>클라우드인프라관리  ·  12주차 2차시</a:t>
             </a:r>
@@ -5427,6 +5455,8 @@
                   <a:srgbClr val="5B6373"/>
                 </a:solidFill>
                 <a:latin typeface="맑은 고딕"/>
+                <a:ea typeface="맑은 고딕"/>
+                <a:cs typeface="맑은 고딕"/>
               </a:rPr>
               <a:t>10 / 13</a:t>
             </a:r>
@@ -5630,6 +5660,8 @@
                   <a:srgbClr val="14213D"/>
                 </a:solidFill>
                 <a:latin typeface="맑은 고딕"/>
+                <a:ea typeface="맑은 고딕"/>
+                <a:cs typeface="맑은 고딕"/>
               </a:rPr>
               <a:t>03</a:t>
             </a:r>
@@ -5665,6 +5697,8 @@
                   <a:srgbClr val="14B8A6"/>
                 </a:solidFill>
                 <a:latin typeface="맑은 고딕"/>
+                <a:ea typeface="맑은 고딕"/>
+                <a:cs typeface="맑은 고딕"/>
               </a:rPr>
               <a:t>실습 안내</a:t>
             </a:r>
@@ -5700,6 +5734,8 @@
                   <a:srgbClr val="FFFFFF"/>
                 </a:solidFill>
                 <a:latin typeface="맑은 고딕"/>
+                <a:ea typeface="맑은 고딕"/>
+                <a:cs typeface="맑은 고딕"/>
               </a:rPr>
               <a:t>VM 안내 — Jenkinsfile 작성+수동 빌드</a:t>
             </a:r>
@@ -5739,6 +5775,8 @@
                   <a:srgbClr val="0D9488"/>
                 </a:solidFill>
                 <a:latin typeface="맑은 고딕"/>
+                <a:ea typeface="맑은 고딕"/>
+                <a:cs typeface="맑은 고딕"/>
               </a:rPr>
               <a:t>●  </a:t>
             </a:r>
@@ -5748,6 +5786,8 @@
                   <a:srgbClr val="222733"/>
                 </a:solidFill>
                 <a:latin typeface="맑은 고딕"/>
+                <a:ea typeface="맑은 고딕"/>
+                <a:cs typeface="맑은 고딕"/>
               </a:rPr>
               <a:t>개인 VM Jenkins에서 Pipeline Job(예: myflask-pipeline) 생성</a:t>
             </a:r>
@@ -5764,6 +5804,8 @@
                   <a:srgbClr val="0D9488"/>
                 </a:solidFill>
                 <a:latin typeface="맑은 고딕"/>
+                <a:ea typeface="맑은 고딕"/>
+                <a:cs typeface="맑은 고딕"/>
               </a:rPr>
               <a:t>●  </a:t>
             </a:r>
@@ -5773,6 +5815,8 @@
                   <a:srgbClr val="222733"/>
                 </a:solidFill>
                 <a:latin typeface="맑은 고딕"/>
+                <a:ea typeface="맑은 고딕"/>
+                <a:cs typeface="맑은 고딕"/>
               </a:rPr>
               <a:t>본인 cloud-lab 저장소를 Checkout하고 docker build를 실행하는 Jenkinsfile 작성</a:t>
             </a:r>
@@ -5789,6 +5833,8 @@
                   <a:srgbClr val="0D9488"/>
                 </a:solidFill>
                 <a:latin typeface="맑은 고딕"/>
+                <a:ea typeface="맑은 고딕"/>
+                <a:cs typeface="맑은 고딕"/>
               </a:rPr>
               <a:t>●  </a:t>
             </a:r>
@@ -5798,6 +5844,8 @@
                   <a:srgbClr val="222733"/>
                 </a:solidFill>
                 <a:latin typeface="맑은 고딕"/>
+                <a:ea typeface="맑은 고딕"/>
+                <a:cs typeface="맑은 고딕"/>
               </a:rPr>
               <a:t>Build Now 실행 후 Stage View + Console Output 캡처</a:t>
             </a:r>
@@ -5814,6 +5862,8 @@
                   <a:srgbClr val="0D9488"/>
                 </a:solidFill>
                 <a:latin typeface="맑은 고딕"/>
+                <a:ea typeface="맑은 고딕"/>
+                <a:cs typeface="맑은 고딕"/>
               </a:rPr>
               <a:t>●  </a:t>
             </a:r>
@@ -5823,6 +5873,8 @@
                   <a:srgbClr val="222733"/>
                 </a:solidFill>
                 <a:latin typeface="맑은 고딕"/>
+                <a:ea typeface="맑은 고딕"/>
+                <a:cs typeface="맑은 고딕"/>
               </a:rPr>
               <a:t>docker images로 생성된 이미지 확인 캡처</a:t>
             </a:r>
@@ -5858,6 +5910,8 @@
                   <a:srgbClr val="5B6373"/>
                 </a:solidFill>
                 <a:latin typeface="맑은 고딕"/>
+                <a:ea typeface="맑은 고딕"/>
+                <a:cs typeface="맑은 고딕"/>
               </a:rPr>
               <a:t>클라우드인프라관리  ·  12주차 2차시</a:t>
             </a:r>
@@ -5893,6 +5947,8 @@
                   <a:srgbClr val="5B6373"/>
                 </a:solidFill>
                 <a:latin typeface="맑은 고딕"/>
+                <a:ea typeface="맑은 고딕"/>
+                <a:cs typeface="맑은 고딕"/>
               </a:rPr>
               <a:t>11 / 13</a:t>
             </a:r>
@@ -6078,6 +6134,8 @@
                   <a:srgbClr val="FFFFFF"/>
                 </a:solidFill>
                 <a:latin typeface="맑은 고딕"/>
+                <a:ea typeface="맑은 고딕"/>
+                <a:cs typeface="맑은 고딕"/>
               </a:rPr>
               <a:t>오늘의 정리</a:t>
             </a:r>
@@ -6131,6 +6189,8 @@
                   <a:srgbClr val="14213D"/>
                 </a:solidFill>
                 <a:latin typeface="맑은 고딕"/>
+                <a:ea typeface="맑은 고딕"/>
+                <a:cs typeface="맑은 고딕"/>
               </a:rPr>
               <a:t>1</a:t>
             </a:r>
@@ -6166,6 +6226,8 @@
                   <a:srgbClr val="FFFFFF"/>
                 </a:solidFill>
                 <a:latin typeface="맑은 고딕"/>
+                <a:ea typeface="맑은 고딕"/>
+                <a:cs typeface="맑은 고딕"/>
               </a:rPr>
               <a:t>Pipeline Job은 Freestyle과 달리 Jenkinsfile(코드)로 빌드 단계를 정의한다</a:t>
             </a:r>
@@ -6219,6 +6281,8 @@
                   <a:srgbClr val="14213D"/>
                 </a:solidFill>
                 <a:latin typeface="맑은 고딕"/>
+                <a:ea typeface="맑은 고딕"/>
+                <a:cs typeface="맑은 고딕"/>
               </a:rPr>
               <a:t>2</a:t>
             </a:r>
@@ -6254,6 +6318,8 @@
                   <a:srgbClr val="FFFFFF"/>
                 </a:solidFill>
                 <a:latin typeface="맑은 고딕"/>
+                <a:ea typeface="맑은 고딕"/>
+                <a:cs typeface="맑은 고딕"/>
               </a:rPr>
               <a:t>Checkout stage로 GitHub 코드를 받아오고, Build stage로 docker build를 실행하는 흐름을 직접 만들었다</a:t>
             </a:r>
@@ -6395,6 +6461,8 @@
                   <a:srgbClr val="FFFFFF"/>
                 </a:solidFill>
                 <a:latin typeface="맑은 고딕"/>
+                <a:ea typeface="맑은 고딕"/>
+                <a:cs typeface="맑은 고딕"/>
               </a:rPr>
               <a:t>다음 차시 예고</a:t>
             </a:r>
@@ -6430,6 +6498,8 @@
                   <a:srgbClr val="14B8A6"/>
                 </a:solidFill>
                 <a:latin typeface="맑은 고딕"/>
+                <a:ea typeface="맑은 고딕"/>
+                <a:cs typeface="맑은 고딕"/>
               </a:rPr>
               <a:t>다음 차시 예고 — 12주차 3차시</a:t>
             </a:r>
@@ -6465,6 +6535,8 @@
                   <a:srgbClr val="FFFFFF"/>
                 </a:solidFill>
                 <a:latin typeface="맑은 고딕"/>
+                <a:ea typeface="맑은 고딕"/>
+                <a:cs typeface="맑은 고딕"/>
               </a:rPr>
               <a:t>매번 Build Now를 누르는 대신, GitHub에 push하면 자동으로 빌드가 시작되도록 Poll SCM으로 연동합니다.</a:t>
             </a:r>
@@ -6606,6 +6678,8 @@
                   <a:srgbClr val="14B8A6"/>
                 </a:solidFill>
                 <a:latin typeface="맑은 고딕"/>
+                <a:ea typeface="맑은 고딕"/>
+                <a:cs typeface="맑은 고딕"/>
               </a:rPr>
               <a:t>SESSION OVERVIEW</a:t>
             </a:r>
@@ -6641,6 +6715,8 @@
                   <a:srgbClr val="FFFFFF"/>
                 </a:solidFill>
                 <a:latin typeface="맑은 고딕"/>
+                <a:ea typeface="맑은 고딕"/>
+                <a:cs typeface="맑은 고딕"/>
               </a:rPr>
               <a:t>오늘의 학습 목표</a:t>
             </a:r>
@@ -6680,6 +6756,8 @@
                   <a:srgbClr val="222733"/>
                 </a:solidFill>
                 <a:latin typeface="맑은 고딕"/>
+                <a:ea typeface="맑은 고딕"/>
+                <a:cs typeface="맑은 고딕"/>
               </a:rPr>
               <a:t>1.  Checkout·Build 단계를 포함한 실제 Jenkinsfile을 작성한다</a:t>
             </a:r>
@@ -6696,6 +6774,8 @@
                   <a:srgbClr val="222733"/>
                 </a:solidFill>
                 <a:latin typeface="맑은 고딕"/>
+                <a:ea typeface="맑은 고딕"/>
+                <a:cs typeface="맑은 고딕"/>
               </a:rPr>
               <a:t>2.  Pipeline 타입 Job을 만들고 Jenkinsfile을 연결한다</a:t>
             </a:r>
@@ -6712,6 +6792,8 @@
                   <a:srgbClr val="222733"/>
                 </a:solidFill>
                 <a:latin typeface="맑은 고딕"/>
+                <a:ea typeface="맑은 고딕"/>
+                <a:cs typeface="맑은 고딕"/>
               </a:rPr>
               <a:t>3.  Build Now로 수동 실행하고 Console Output에서 각 Stage 결과를 확인한다</a:t>
             </a:r>
@@ -6747,6 +6829,8 @@
                   <a:srgbClr val="5B6373"/>
                 </a:solidFill>
                 <a:latin typeface="맑은 고딕"/>
+                <a:ea typeface="맑은 고딕"/>
+                <a:cs typeface="맑은 고딕"/>
               </a:rPr>
               <a:t>클라우드인프라관리  ·  12주차 2차시</a:t>
             </a:r>
@@ -6782,6 +6866,8 @@
                   <a:srgbClr val="5B6373"/>
                 </a:solidFill>
                 <a:latin typeface="맑은 고딕"/>
+                <a:ea typeface="맑은 고딕"/>
+                <a:cs typeface="맑은 고딕"/>
               </a:rPr>
               <a:t>02 / 13</a:t>
             </a:r>
@@ -6967,6 +7053,8 @@
                   <a:srgbClr val="14B8A6"/>
                 </a:solidFill>
                 <a:latin typeface="맑은 고딕"/>
+                <a:ea typeface="맑은 고딕"/>
+                <a:cs typeface="맑은 고딕"/>
               </a:rPr>
               <a:t>SESSION OVERVIEW</a:t>
             </a:r>
@@ -7002,6 +7090,8 @@
                   <a:srgbClr val="FFFFFF"/>
                 </a:solidFill>
                 <a:latin typeface="맑은 고딕"/>
+                <a:ea typeface="맑은 고딕"/>
+                <a:cs typeface="맑은 고딕"/>
               </a:rPr>
               <a:t>오늘의 진행 순서</a:t>
             </a:r>
@@ -7213,6 +7303,8 @@
                   <a:srgbClr val="FFFFFF"/>
                 </a:solidFill>
                 <a:latin typeface="맑은 고딕"/>
+                <a:ea typeface="맑은 고딕"/>
+                <a:cs typeface="맑은 고딕"/>
               </a:rPr>
               <a:t>1</a:t>
             </a:r>
@@ -7296,6 +7388,8 @@
                   <a:srgbClr val="14213D"/>
                 </a:solidFill>
                 <a:latin typeface="맑은 고딕"/>
+                <a:ea typeface="맑은 고딕"/>
+                <a:cs typeface="맑은 고딕"/>
               </a:rPr>
               <a:t>개념 설명</a:t>
             </a:r>
@@ -7335,6 +7429,8 @@
                   <a:srgbClr val="222733"/>
                 </a:solidFill>
                 <a:latin typeface="맑은 고딕"/>
+                <a:ea typeface="맑은 고딕"/>
+                <a:cs typeface="맑은 고딕"/>
               </a:rPr>
               <a:t>강의자료 기반 직접 강의</a:t>
             </a:r>
@@ -7414,6 +7510,8 @@
                   <a:srgbClr val="FFFFFF"/>
                 </a:solidFill>
                 <a:latin typeface="맑은 고딕"/>
+                <a:ea typeface="맑은 고딕"/>
+                <a:cs typeface="맑은 고딕"/>
               </a:rPr>
               <a:t>2</a:t>
             </a:r>
@@ -7497,6 +7595,8 @@
                   <a:srgbClr val="14213D"/>
                 </a:solidFill>
                 <a:latin typeface="맑은 고딕"/>
+                <a:ea typeface="맑은 고딕"/>
+                <a:cs typeface="맑은 고딕"/>
               </a:rPr>
               <a:t>Killercoda</a:t>
             </a:r>
@@ -7536,6 +7636,8 @@
                   <a:srgbClr val="222733"/>
                 </a:solidFill>
                 <a:latin typeface="맑은 고딕"/>
+                <a:ea typeface="맑은 고딕"/>
+                <a:cs typeface="맑은 고딕"/>
               </a:rPr>
               <a:t>Pipeline Job 생성 실습</a:t>
             </a:r>
@@ -7615,6 +7717,8 @@
                   <a:srgbClr val="FFFFFF"/>
                 </a:solidFill>
                 <a:latin typeface="맑은 고딕"/>
+                <a:ea typeface="맑은 고딕"/>
+                <a:cs typeface="맑은 고딕"/>
               </a:rPr>
               <a:t>3</a:t>
             </a:r>
@@ -7698,6 +7802,8 @@
                   <a:srgbClr val="14213D"/>
                 </a:solidFill>
                 <a:latin typeface="맑은 고딕"/>
+                <a:ea typeface="맑은 고딕"/>
+                <a:cs typeface="맑은 고딕"/>
               </a:rPr>
               <a:t>VM 안내</a:t>
             </a:r>
@@ -7737,6 +7843,8 @@
                   <a:srgbClr val="222733"/>
                 </a:solidFill>
                 <a:latin typeface="맑은 고딕"/>
+                <a:ea typeface="맑은 고딕"/>
+                <a:cs typeface="맑은 고딕"/>
               </a:rPr>
               <a:t>VM에서 동일 실습</a:t>
             </a:r>
@@ -7816,6 +7924,8 @@
                   <a:srgbClr val="FFFFFF"/>
                 </a:solidFill>
                 <a:latin typeface="맑은 고딕"/>
+                <a:ea typeface="맑은 고딕"/>
+                <a:cs typeface="맑은 고딕"/>
               </a:rPr>
               <a:t>4</a:t>
             </a:r>
@@ -7899,6 +8009,8 @@
                   <a:srgbClr val="14213D"/>
                 </a:solidFill>
                 <a:latin typeface="맑은 고딕"/>
+                <a:ea typeface="맑은 고딕"/>
+                <a:cs typeface="맑은 고딕"/>
               </a:rPr>
               <a:t>결과 제출</a:t>
             </a:r>
@@ -7938,6 +8050,8 @@
                   <a:srgbClr val="222733"/>
                 </a:solidFill>
                 <a:latin typeface="맑은 고딕"/>
+                <a:ea typeface="맑은 고딕"/>
+                <a:cs typeface="맑은 고딕"/>
               </a:rPr>
               <a:t>체크리스트 제출</a:t>
             </a:r>
@@ -7973,6 +8087,8 @@
                   <a:srgbClr val="5B6373"/>
                 </a:solidFill>
                 <a:latin typeface="맑은 고딕"/>
+                <a:ea typeface="맑은 고딕"/>
+                <a:cs typeface="맑은 고딕"/>
               </a:rPr>
               <a:t>클라우드인프라관리  ·  12주차 2차시</a:t>
             </a:r>
@@ -8008,6 +8124,8 @@
                   <a:srgbClr val="5B6373"/>
                 </a:solidFill>
                 <a:latin typeface="맑은 고딕"/>
+                <a:ea typeface="맑은 고딕"/>
+                <a:cs typeface="맑은 고딕"/>
               </a:rPr>
               <a:t>03 / 13</a:t>
             </a:r>
@@ -8211,6 +8329,8 @@
                   <a:srgbClr val="14213D"/>
                 </a:solidFill>
                 <a:latin typeface="맑은 고딕"/>
+                <a:ea typeface="맑은 고딕"/>
+                <a:cs typeface="맑은 고딕"/>
               </a:rPr>
               <a:t>PART 01</a:t>
             </a:r>
@@ -8246,6 +8366,8 @@
                   <a:srgbClr val="FFFFFF"/>
                 </a:solidFill>
                 <a:latin typeface="맑은 고딕"/>
+                <a:ea typeface="맑은 고딕"/>
+                <a:cs typeface="맑은 고딕"/>
               </a:rPr>
               <a:t>실전 Jenkinsfile 작성</a:t>
             </a:r>
@@ -8281,6 +8403,8 @@
                   <a:srgbClr val="C9D3E6"/>
                 </a:solidFill>
                 <a:latin typeface="맑은 고딕"/>
+                <a:ea typeface="맑은 고딕"/>
+                <a:cs typeface="맑은 고딕"/>
               </a:rPr>
               <a:t>Checkout과 Build 단계 추가하기</a:t>
             </a:r>
@@ -8440,6 +8564,8 @@
                   <a:srgbClr val="14213D"/>
                 </a:solidFill>
                 <a:latin typeface="맑은 고딕"/>
+                <a:ea typeface="맑은 고딕"/>
+                <a:cs typeface="맑은 고딕"/>
               </a:rPr>
               <a:t>01</a:t>
             </a:r>
@@ -8475,6 +8601,8 @@
                   <a:srgbClr val="14B8A6"/>
                 </a:solidFill>
                 <a:latin typeface="맑은 고딕"/>
+                <a:ea typeface="맑은 고딕"/>
+                <a:cs typeface="맑은 고딕"/>
               </a:rPr>
               <a:t>PART 1 · Jenkinsfile 작성</a:t>
             </a:r>
@@ -8510,6 +8638,8 @@
                   <a:srgbClr val="FFFFFF"/>
                 </a:solidFill>
                 <a:latin typeface="맑은 고딕"/>
+                <a:ea typeface="맑은 고딕"/>
+                <a:cs typeface="맑은 고딕"/>
               </a:rPr>
               <a:t>3주차 Flask 앱을 다시 활용</a:t>
             </a:r>
@@ -8549,6 +8679,8 @@
                   <a:srgbClr val="0D9488"/>
                 </a:solidFill>
                 <a:latin typeface="맑은 고딕"/>
+                <a:ea typeface="맑은 고딕"/>
+                <a:cs typeface="맑은 고딕"/>
               </a:rPr>
               <a:t>●  </a:t>
             </a:r>
@@ -8558,6 +8690,8 @@
                   <a:srgbClr val="222733"/>
                 </a:solidFill>
                 <a:latin typeface="맑은 고딕"/>
+                <a:ea typeface="맑은 고딕"/>
+                <a:cs typeface="맑은 고딕"/>
               </a:rPr>
               <a:t>3주차에 GitHub에 올린 cloud-lab 저장소(app.py, Dockerfile)를 그대로 사용</a:t>
             </a:r>
@@ -8574,6 +8708,8 @@
                   <a:srgbClr val="0D9488"/>
                 </a:solidFill>
                 <a:latin typeface="맑은 고딕"/>
+                <a:ea typeface="맑은 고딕"/>
+                <a:cs typeface="맑은 고딕"/>
               </a:rPr>
               <a:t>●  </a:t>
             </a:r>
@@ -8583,6 +8719,8 @@
                   <a:srgbClr val="222733"/>
                 </a:solidFill>
                 <a:latin typeface="맑은 고딕"/>
+                <a:ea typeface="맑은 고딕"/>
+                <a:cs typeface="맑은 고딕"/>
               </a:rPr>
               <a:t>오늘은 이 저장소를 Checkout해서 docker build까지 실행하는 Jenkinsfile을 작성</a:t>
             </a:r>
@@ -8599,6 +8737,8 @@
                   <a:srgbClr val="0D9488"/>
                 </a:solidFill>
                 <a:latin typeface="맑은 고딕"/>
+                <a:ea typeface="맑은 고딕"/>
+                <a:cs typeface="맑은 고딕"/>
               </a:rPr>
               <a:t>●  </a:t>
             </a:r>
@@ -8608,6 +8748,8 @@
                   <a:srgbClr val="222733"/>
                 </a:solidFill>
                 <a:latin typeface="맑은 고딕"/>
+                <a:ea typeface="맑은 고딕"/>
+                <a:cs typeface="맑은 고딕"/>
               </a:rPr>
               <a:t>13주차 대통합 실습에서 쓸 Jenkinsfile의 축소판이라고 생각하면 이해가 쉬움</a:t>
             </a:r>
@@ -8643,6 +8785,8 @@
                   <a:srgbClr val="5B6373"/>
                 </a:solidFill>
                 <a:latin typeface="맑은 고딕"/>
+                <a:ea typeface="맑은 고딕"/>
+                <a:cs typeface="맑은 고딕"/>
               </a:rPr>
               <a:t>클라우드인프라관리  ·  12주차 2차시</a:t>
             </a:r>
@@ -8678,6 +8822,8 @@
                   <a:srgbClr val="5B6373"/>
                 </a:solidFill>
                 <a:latin typeface="맑은 고딕"/>
+                <a:ea typeface="맑은 고딕"/>
+                <a:cs typeface="맑은 고딕"/>
               </a:rPr>
               <a:t>05 / 13</a:t>
             </a:r>
@@ -8881,6 +9027,8 @@
                   <a:srgbClr val="14213D"/>
                 </a:solidFill>
                 <a:latin typeface="맑은 고딕"/>
+                <a:ea typeface="맑은 고딕"/>
+                <a:cs typeface="맑은 고딕"/>
               </a:rPr>
               <a:t>01</a:t>
             </a:r>
@@ -8916,6 +9064,8 @@
                   <a:srgbClr val="14B8A6"/>
                 </a:solidFill>
                 <a:latin typeface="맑은 고딕"/>
+                <a:ea typeface="맑은 고딕"/>
+                <a:cs typeface="맑은 고딕"/>
               </a:rPr>
               <a:t>PART 1 · Jenkinsfile 작성</a:t>
             </a:r>
@@ -8951,6 +9101,8 @@
                   <a:srgbClr val="FFFFFF"/>
                 </a:solidFill>
                 <a:latin typeface="맑은 고딕"/>
+                <a:ea typeface="맑은 고딕"/>
+                <a:cs typeface="맑은 고딕"/>
               </a:rPr>
               <a:t>Checkout + Build 단계</a:t>
             </a:r>
@@ -8990,6 +9142,8 @@
                   <a:srgbClr val="0D9488"/>
                 </a:solidFill>
                 <a:latin typeface="맑은 고딕"/>
+                <a:ea typeface="맑은 고딕"/>
+                <a:cs typeface="맑은 고딕"/>
               </a:rPr>
               <a:t>●  </a:t>
             </a:r>
@@ -8999,6 +9153,8 @@
                   <a:srgbClr val="222733"/>
                 </a:solidFill>
                 <a:latin typeface="맑은 고딕"/>
+                <a:ea typeface="맑은 고딕"/>
+                <a:cs typeface="맑은 고딕"/>
               </a:rPr>
               <a:t>pipeline {</a:t>
             </a:r>
@@ -9015,6 +9171,8 @@
                   <a:srgbClr val="0D9488"/>
                 </a:solidFill>
                 <a:latin typeface="맑은 고딕"/>
+                <a:ea typeface="맑은 고딕"/>
+                <a:cs typeface="맑은 고딕"/>
               </a:rPr>
               <a:t>●  </a:t>
             </a:r>
@@ -9024,6 +9182,8 @@
                   <a:srgbClr val="222733"/>
                 </a:solidFill>
                 <a:latin typeface="맑은 고딕"/>
+                <a:ea typeface="맑은 고딕"/>
+                <a:cs typeface="맑은 고딕"/>
               </a:rPr>
               <a:t>  agent any</a:t>
             </a:r>
@@ -9040,6 +9200,8 @@
                   <a:srgbClr val="0D9488"/>
                 </a:solidFill>
                 <a:latin typeface="맑은 고딕"/>
+                <a:ea typeface="맑은 고딕"/>
+                <a:cs typeface="맑은 고딕"/>
               </a:rPr>
               <a:t>●  </a:t>
             </a:r>
@@ -9049,6 +9211,8 @@
                   <a:srgbClr val="222733"/>
                 </a:solidFill>
                 <a:latin typeface="맑은 고딕"/>
+                <a:ea typeface="맑은 고딕"/>
+                <a:cs typeface="맑은 고딕"/>
               </a:rPr>
               <a:t>  stages {</a:t>
             </a:r>
@@ -9065,6 +9229,8 @@
                   <a:srgbClr val="0D9488"/>
                 </a:solidFill>
                 <a:latin typeface="맑은 고딕"/>
+                <a:ea typeface="맑은 고딕"/>
+                <a:cs typeface="맑은 고딕"/>
               </a:rPr>
               <a:t>●  </a:t>
             </a:r>
@@ -9074,6 +9240,8 @@
                   <a:srgbClr val="222733"/>
                 </a:solidFill>
                 <a:latin typeface="맑은 고딕"/>
+                <a:ea typeface="맑은 고딕"/>
+                <a:cs typeface="맑은 고딕"/>
               </a:rPr>
               <a:t>    stage("Checkout") {</a:t>
             </a:r>
@@ -9090,6 +9258,8 @@
                   <a:srgbClr val="0D9488"/>
                 </a:solidFill>
                 <a:latin typeface="맑은 고딕"/>
+                <a:ea typeface="맑은 고딕"/>
+                <a:cs typeface="맑은 고딕"/>
               </a:rPr>
               <a:t>●  </a:t>
             </a:r>
@@ -9099,6 +9269,8 @@
                   <a:srgbClr val="222733"/>
                 </a:solidFill>
                 <a:latin typeface="맑은 고딕"/>
+                <a:ea typeface="맑은 고딕"/>
+                <a:cs typeface="맑은 고딕"/>
               </a:rPr>
               <a:t>      steps { git url: "https://github.com/{id}/cloud-lab.git", branch: "main" }</a:t>
             </a:r>
@@ -9115,6 +9287,8 @@
                   <a:srgbClr val="0D9488"/>
                 </a:solidFill>
                 <a:latin typeface="맑은 고딕"/>
+                <a:ea typeface="맑은 고딕"/>
+                <a:cs typeface="맑은 고딕"/>
               </a:rPr>
               <a:t>●  </a:t>
             </a:r>
@@ -9124,6 +9298,8 @@
                   <a:srgbClr val="222733"/>
                 </a:solidFill>
                 <a:latin typeface="맑은 고딕"/>
+                <a:ea typeface="맑은 고딕"/>
+                <a:cs typeface="맑은 고딕"/>
               </a:rPr>
               <a:t>    }</a:t>
             </a:r>
@@ -9140,6 +9316,8 @@
                   <a:srgbClr val="0D9488"/>
                 </a:solidFill>
                 <a:latin typeface="맑은 고딕"/>
+                <a:ea typeface="맑은 고딕"/>
+                <a:cs typeface="맑은 고딕"/>
               </a:rPr>
               <a:t>●  </a:t>
             </a:r>
@@ -9149,6 +9327,8 @@
                   <a:srgbClr val="222733"/>
                 </a:solidFill>
                 <a:latin typeface="맑은 고딕"/>
+                <a:ea typeface="맑은 고딕"/>
+                <a:cs typeface="맑은 고딕"/>
               </a:rPr>
               <a:t>    stage("Build") {</a:t>
             </a:r>
@@ -9165,6 +9345,8 @@
                   <a:srgbClr val="0D9488"/>
                 </a:solidFill>
                 <a:latin typeface="맑은 고딕"/>
+                <a:ea typeface="맑은 고딕"/>
+                <a:cs typeface="맑은 고딕"/>
               </a:rPr>
               <a:t>●  </a:t>
             </a:r>
@@ -9174,6 +9356,8 @@
                   <a:srgbClr val="222733"/>
                 </a:solidFill>
                 <a:latin typeface="맑은 고딕"/>
+                <a:ea typeface="맑은 고딕"/>
+                <a:cs typeface="맑은 고딕"/>
               </a:rPr>
               <a:t>      steps { sh "docker build -t myflask:test ." }</a:t>
             </a:r>
@@ -9190,6 +9374,8 @@
                   <a:srgbClr val="0D9488"/>
                 </a:solidFill>
                 <a:latin typeface="맑은 고딕"/>
+                <a:ea typeface="맑은 고딕"/>
+                <a:cs typeface="맑은 고딕"/>
               </a:rPr>
               <a:t>●  </a:t>
             </a:r>
@@ -9199,6 +9385,8 @@
                   <a:srgbClr val="222733"/>
                 </a:solidFill>
                 <a:latin typeface="맑은 고딕"/>
+                <a:ea typeface="맑은 고딕"/>
+                <a:cs typeface="맑은 고딕"/>
               </a:rPr>
               <a:t>    }</a:t>
             </a:r>
@@ -9215,6 +9403,8 @@
                   <a:srgbClr val="0D9488"/>
                 </a:solidFill>
                 <a:latin typeface="맑은 고딕"/>
+                <a:ea typeface="맑은 고딕"/>
+                <a:cs typeface="맑은 고딕"/>
               </a:rPr>
               <a:t>●  </a:t>
             </a:r>
@@ -9224,6 +9414,8 @@
                   <a:srgbClr val="222733"/>
                 </a:solidFill>
                 <a:latin typeface="맑은 고딕"/>
+                <a:ea typeface="맑은 고딕"/>
+                <a:cs typeface="맑은 고딕"/>
               </a:rPr>
               <a:t>  }</a:t>
             </a:r>
@@ -9240,6 +9432,8 @@
                   <a:srgbClr val="0D9488"/>
                 </a:solidFill>
                 <a:latin typeface="맑은 고딕"/>
+                <a:ea typeface="맑은 고딕"/>
+                <a:cs typeface="맑은 고딕"/>
               </a:rPr>
               <a:t>●  </a:t>
             </a:r>
@@ -9249,6 +9443,8 @@
                   <a:srgbClr val="222733"/>
                 </a:solidFill>
                 <a:latin typeface="맑은 고딕"/>
+                <a:ea typeface="맑은 고딕"/>
+                <a:cs typeface="맑은 고딕"/>
               </a:rPr>
               <a:t>}</a:t>
             </a:r>
@@ -9284,6 +9480,8 @@
                   <a:srgbClr val="5B6373"/>
                 </a:solidFill>
                 <a:latin typeface="맑은 고딕"/>
+                <a:ea typeface="맑은 고딕"/>
+                <a:cs typeface="맑은 고딕"/>
               </a:rPr>
               <a:t>클라우드인프라관리  ·  12주차 2차시</a:t>
             </a:r>
@@ -9319,6 +9517,8 @@
                   <a:srgbClr val="5B6373"/>
                 </a:solidFill>
                 <a:latin typeface="맑은 고딕"/>
+                <a:ea typeface="맑은 고딕"/>
+                <a:cs typeface="맑은 고딕"/>
               </a:rPr>
               <a:t>06 / 13</a:t>
             </a:r>
@@ -9522,6 +9722,8 @@
                   <a:srgbClr val="14213D"/>
                 </a:solidFill>
                 <a:latin typeface="맑은 고딕"/>
+                <a:ea typeface="맑은 고딕"/>
+                <a:cs typeface="맑은 고딕"/>
               </a:rPr>
               <a:t>PART 02</a:t>
             </a:r>
@@ -9557,6 +9759,8 @@
                   <a:srgbClr val="FFFFFF"/>
                 </a:solidFill>
                 <a:latin typeface="맑은 고딕"/>
+                <a:ea typeface="맑은 고딕"/>
+                <a:cs typeface="맑은 고딕"/>
               </a:rPr>
               <a:t>Pipeline Job 만들기</a:t>
             </a:r>
@@ -9592,6 +9796,8 @@
                   <a:srgbClr val="C9D3E6"/>
                 </a:solidFill>
                 <a:latin typeface="맑은 고딕"/>
+                <a:ea typeface="맑은 고딕"/>
+                <a:cs typeface="맑은 고딕"/>
               </a:rPr>
               <a:t>Freestyle이 아니라 Pipeline 타입으로</a:t>
             </a:r>
@@ -9751,6 +9957,8 @@
                   <a:srgbClr val="14213D"/>
                 </a:solidFill>
                 <a:latin typeface="맑은 고딕"/>
+                <a:ea typeface="맑은 고딕"/>
+                <a:cs typeface="맑은 고딕"/>
               </a:rPr>
               <a:t>02</a:t>
             </a:r>
@@ -9786,6 +9994,8 @@
                   <a:srgbClr val="14B8A6"/>
                 </a:solidFill>
                 <a:latin typeface="맑은 고딕"/>
+                <a:ea typeface="맑은 고딕"/>
+                <a:cs typeface="맑은 고딕"/>
               </a:rPr>
               <a:t>PART 2 · Pipeline Job</a:t>
             </a:r>
@@ -9821,6 +10031,8 @@
                   <a:srgbClr val="FFFFFF"/>
                 </a:solidFill>
                 <a:latin typeface="맑은 고딕"/>
+                <a:ea typeface="맑은 고딕"/>
+                <a:cs typeface="맑은 고딕"/>
               </a:rPr>
               <a:t>Pipeline Job 생성 절차</a:t>
             </a:r>
@@ -9860,6 +10072,8 @@
                   <a:srgbClr val="0D9488"/>
                 </a:solidFill>
                 <a:latin typeface="맑은 고딕"/>
+                <a:ea typeface="맑은 고딕"/>
+                <a:cs typeface="맑은 고딕"/>
               </a:rPr>
               <a:t>●  </a:t>
             </a:r>
@@ -9869,6 +10083,8 @@
                   <a:srgbClr val="222733"/>
                 </a:solidFill>
                 <a:latin typeface="맑은 고딕"/>
+                <a:ea typeface="맑은 고딕"/>
+                <a:cs typeface="맑은 고딕"/>
               </a:rPr>
               <a:t>New Item → Pipeline 선택 (Freestyle project가 아님에 주의)</a:t>
             </a:r>
@@ -9885,6 +10101,8 @@
                   <a:srgbClr val="0D9488"/>
                 </a:solidFill>
                 <a:latin typeface="맑은 고딕"/>
+                <a:ea typeface="맑은 고딕"/>
+                <a:cs typeface="맑은 고딕"/>
               </a:rPr>
               <a:t>●  </a:t>
             </a:r>
@@ -9894,6 +10112,8 @@
                   <a:srgbClr val="222733"/>
                 </a:solidFill>
                 <a:latin typeface="맑은 고딕"/>
+                <a:ea typeface="맑은 고딕"/>
+                <a:cs typeface="맑은 고딕"/>
               </a:rPr>
               <a:t>Pipeline 섹션의 'Pipeline script'에 Jenkinsfile 내용을 그대로 붙여넣기</a:t>
             </a:r>
@@ -9910,6 +10130,8 @@
                   <a:srgbClr val="0D9488"/>
                 </a:solidFill>
                 <a:latin typeface="맑은 고딕"/>
+                <a:ea typeface="맑은 고딕"/>
+                <a:cs typeface="맑은 고딕"/>
               </a:rPr>
               <a:t>●  </a:t>
             </a:r>
@@ -9919,6 +10141,8 @@
                   <a:srgbClr val="222733"/>
                 </a:solidFill>
                 <a:latin typeface="맑은 고딕"/>
+                <a:ea typeface="맑은 고딕"/>
+                <a:cs typeface="맑은 고딕"/>
               </a:rPr>
               <a:t>저장 후 Build Now 클릭 → Stage View에서 Checkout·Build 단계가 순서대로 진행되는 것을 확인</a:t>
             </a:r>
@@ -9954,6 +10178,8 @@
                   <a:srgbClr val="14213D"/>
                 </a:solidFill>
                 <a:latin typeface="맑은 고딕"/>
+                <a:ea typeface="맑은 고딕"/>
+                <a:cs typeface="맑은 고딕"/>
               </a:rPr>
               <a:t>Pipeline Job 생성 흐름</a:t>
             </a:r>
@@ -10033,6 +10259,8 @@
                   <a:srgbClr val="FFFFFF"/>
                 </a:solidFill>
                 <a:latin typeface="맑은 고딕"/>
+                <a:ea typeface="맑은 고딕"/>
+                <a:cs typeface="맑은 고딕"/>
               </a:rPr>
               <a:t>New Item → Pipeline</a:t>
             </a:r>
@@ -10112,6 +10340,8 @@
                   <a:srgbClr val="FFFFFF"/>
                 </a:solidFill>
                 <a:latin typeface="맑은 고딕"/>
+                <a:ea typeface="맑은 고딕"/>
+                <a:cs typeface="맑은 고딕"/>
               </a:rPr>
               <a:t>Pipeline script 입력</a:t>
             </a:r>
@@ -10191,6 +10421,8 @@
                   <a:srgbClr val="FFFFFF"/>
                 </a:solidFill>
                 <a:latin typeface="맑은 고딕"/>
+                <a:ea typeface="맑은 고딕"/>
+                <a:cs typeface="맑은 고딕"/>
               </a:rPr>
               <a:t>Build Now → Stage View 확인</a:t>
             </a:r>
@@ -10226,6 +10458,8 @@
                   <a:srgbClr val="5B6373"/>
                 </a:solidFill>
                 <a:latin typeface="맑은 고딕"/>
+                <a:ea typeface="맑은 고딕"/>
+                <a:cs typeface="맑은 고딕"/>
               </a:rPr>
               <a:t>클라우드인프라관리  ·  12주차 2차시</a:t>
             </a:r>
@@ -10261,6 +10495,8 @@
                   <a:srgbClr val="5B6373"/>
                 </a:solidFill>
                 <a:latin typeface="맑은 고딕"/>
+                <a:ea typeface="맑은 고딕"/>
+                <a:cs typeface="맑은 고딕"/>
               </a:rPr>
               <a:t>08 / 13</a:t>
             </a:r>
@@ -10464,6 +10700,8 @@
                   <a:srgbClr val="14213D"/>
                 </a:solidFill>
                 <a:latin typeface="맑은 고딕"/>
+                <a:ea typeface="맑은 고딕"/>
+                <a:cs typeface="맑은 고딕"/>
               </a:rPr>
               <a:t>02</a:t>
             </a:r>
@@ -10499,6 +10737,8 @@
                   <a:srgbClr val="14B8A6"/>
                 </a:solidFill>
                 <a:latin typeface="맑은 고딕"/>
+                <a:ea typeface="맑은 고딕"/>
+                <a:cs typeface="맑은 고딕"/>
               </a:rPr>
               <a:t>PART 2 · Pipeline Job</a:t>
             </a:r>
@@ -10534,6 +10774,8 @@
                   <a:srgbClr val="FFFFFF"/>
                 </a:solidFill>
                 <a:latin typeface="맑은 고딕"/>
+                <a:ea typeface="맑은 고딕"/>
+                <a:cs typeface="맑은 고딕"/>
               </a:rPr>
               <a:t>결과를 눈으로 확인하기</a:t>
             </a:r>
@@ -10573,6 +10815,8 @@
                   <a:srgbClr val="0D9488"/>
                 </a:solidFill>
                 <a:latin typeface="맑은 고딕"/>
+                <a:ea typeface="맑은 고딕"/>
+                <a:cs typeface="맑은 고딕"/>
               </a:rPr>
               <a:t>●  </a:t>
             </a:r>
@@ -10582,6 +10826,8 @@
                   <a:srgbClr val="222733"/>
                 </a:solidFill>
                 <a:latin typeface="맑은 고딕"/>
+                <a:ea typeface="맑은 고딕"/>
+                <a:cs typeface="맑은 고딕"/>
               </a:rPr>
               <a:t>Build Now 실행 후, 화면에 나타나는 Stage View에서 각 단계가 초록색(성공)인지 확인</a:t>
             </a:r>
@@ -10598,6 +10844,8 @@
                   <a:srgbClr val="0D9488"/>
                 </a:solidFill>
                 <a:latin typeface="맑은 고딕"/>
+                <a:ea typeface="맑은 고딕"/>
+                <a:cs typeface="맑은 고딕"/>
               </a:rPr>
               <a:t>●  </a:t>
             </a:r>
@@ -10607,6 +10855,8 @@
                   <a:srgbClr val="222733"/>
                 </a:solidFill>
                 <a:latin typeface="맑은 고딕"/>
+                <a:ea typeface="맑은 고딕"/>
+                <a:cs typeface="맑은 고딕"/>
               </a:rPr>
               <a:t>Console Output을 열면 git clone 로그와 docker build 로그가 순서대로 출력됨</a:t>
             </a:r>
@@ -10623,6 +10873,8 @@
                   <a:srgbClr val="0D9488"/>
                 </a:solidFill>
                 <a:latin typeface="맑은 고딕"/>
+                <a:ea typeface="맑은 고딕"/>
+                <a:cs typeface="맑은 고딕"/>
               </a:rPr>
               <a:t>●  </a:t>
             </a:r>
@@ -10632,6 +10884,8 @@
                   <a:srgbClr val="222733"/>
                 </a:solidFill>
                 <a:latin typeface="맑은 고딕"/>
+                <a:ea typeface="맑은 고딕"/>
+                <a:cs typeface="맑은 고딕"/>
               </a:rPr>
               <a:t>docker images 로 myflask:test 이미지가 실제로 생성됐는지 VM에서 직접 확인 가능</a:t>
             </a:r>
@@ -10711,6 +10965,8 @@
                   <a:srgbClr val="FFFFFF"/>
                 </a:solidFill>
                 <a:latin typeface="맑은 고딕"/>
+                <a:ea typeface="맑은 고딕"/>
+                <a:cs typeface="맑은 고딕"/>
               </a:rPr>
               <a:t>🔗  13주차 연결</a:t>
             </a:r>
@@ -10746,6 +11002,8 @@
                   <a:srgbClr val="FFFFFF"/>
                 </a:solidFill>
                 <a:latin typeface="맑은 고딕"/>
+                <a:ea typeface="맑은 고딕"/>
+                <a:cs typeface="맑은 고딕"/>
               </a:rPr>
               <a:t>오늘의 Checkout+Build가 13주차에는 Push+Deploy까지 이어져 전체 파이프라인이 완성됩니다</a:t>
             </a:r>
@@ -10781,6 +11039,8 @@
                   <a:srgbClr val="5B6373"/>
                 </a:solidFill>
                 <a:latin typeface="맑은 고딕"/>
+                <a:ea typeface="맑은 고딕"/>
+                <a:cs typeface="맑은 고딕"/>
               </a:rPr>
               <a:t>클라우드인프라관리  ·  12주차 2차시</a:t>
             </a:r>
@@ -10816,6 +11076,8 @@
                   <a:srgbClr val="5B6373"/>
                 </a:solidFill>
                 <a:latin typeface="맑은 고딕"/>
+                <a:ea typeface="맑은 고딕"/>
+                <a:cs typeface="맑은 고딕"/>
               </a:rPr>
               <a:t>09 / 13</a:t>
             </a:r>
